--- a/presentasi/Spill_de_Tea_BMC_Robust_Design.pptx
+++ b/presentasi/Spill_de_Tea_BMC_Robust_Design.pptx
@@ -2352,7 +2352,7 @@
                 <a:ea typeface="Calibri" pitchFamily="34" charset="-122"/>
                 <a:cs typeface="Calibri" pitchFamily="34" charset="-120"/>
               </a:rPr>
-              <a:t>Rasa premium harga mahasiswa: Rp13.000–15.000 vs kompetitor Rp25.000–38.000</a:t>
+              <a:t>Rasa premium harga mahasiswa: Rp15.000–25.000 vs kompetitor Rp25.000–38.000</a:t>
             </a:r>
             <a:endParaRPr lang="en-US" sz="1100" dirty="0"/>
           </a:p>
@@ -3400,7 +3400,7 @@
                 <a:ea typeface="Calibri" pitchFamily="34" charset="-122"/>
                 <a:cs typeface="Calibri" pitchFamily="34" charset="-120"/>
               </a:rPr>
-              <a:t>Penjualan per botol: Aren Rp13.000 · Jasmine Bean Curd &amp; Matcha Cloud Rp15.000</a:t>
+              <a:t>Penjualan per botol: Aren Rp15.000 · Jasmine Bean Curd Rp20.000 · Matcha Cloud Rp25.000</a:t>
             </a:r>
             <a:endParaRPr lang="en-US" sz="950" dirty="0"/>
           </a:p>
@@ -3463,7 +3463,7 @@
                 <a:ea typeface="Calibri" pitchFamily="34" charset="-122"/>
                 <a:cs typeface="Calibri" pitchFamily="34" charset="-120"/>
               </a:rPr>
-              <a:t>Margin kotor ± 68% per botol (Aren)</a:t>
+              <a:t>Margin kotor ± 73% per botol (Aren)</a:t>
             </a:r>
             <a:endParaRPr lang="en-US" sz="950" dirty="0"/>
           </a:p>
